--- a/Projeto POO.pptx
+++ b/Projeto POO.pptx
@@ -3302,7 +3302,7 @@
                 <a:cs typeface="Public Sans"/>
                 <a:sym typeface="Public Sans"/>
               </a:rPr>
-              <a:t>Aplicação para acompanhamento  </a:t>
+              <a:t>Aplicação para gerenciamento </a:t>
             </a:r>
           </a:p>
           <a:p>
@@ -3520,7 +3520,7 @@
                 <a:cs typeface="Agrandir Medium"/>
                 <a:sym typeface="Agrandir Medium"/>
               </a:rPr>
-              <a:t>Nosso projeto é uma aplicação de saúde   focado no acompanhamento de Médico, como como controle de pacientes e medicação.</a:t>
+              <a:t>Nosso projeto é uma aplicação de saúde   focado no gerenciamento Médico, como como controle de pacientes e medicação.</a:t>
             </a:r>
           </a:p>
           <a:p>
@@ -3546,7 +3546,7 @@
                 <a:cs typeface="Agrandir Medium"/>
                 <a:sym typeface="Agrandir Medium"/>
               </a:rPr>
-              <a:t>A plataforma centraliza informações pacientes, médicos, medicamentos como medições, para otimizar o monitoramento do tratamento e a comunicação eficiente entre pacientes e profissionais de saúde.</a:t>
+              <a:t>A plataforma centraliza informações pacientes, médicos, medicamentos e medições, para otimizar o monitoramento do tratamento e a comunicação eficiente entre pacientes e profissionais de saúde.</a:t>
             </a:r>
           </a:p>
         </p:txBody>
@@ -4260,8 +4260,8 @@
         </p:nvSpPr>
         <p:spPr>
           <a:xfrm rot="0">
-            <a:off x="1980889" y="1577587"/>
-            <a:ext cx="14525374" cy="1169661"/>
+            <a:off x="2031219" y="1228725"/>
+            <a:ext cx="14525374" cy="2265036"/>
           </a:xfrm>
           <a:prstGeom prst="rect">
             <a:avLst/>
@@ -4279,7 +4279,7 @@
               </a:lnSpc>
             </a:pPr>
             <a:r>
-              <a:rPr lang="en-US" sz="8999" spc="-863">
+              <a:rPr lang="en-US" sz="8999" spc="-629">
                 <a:solidFill>
                   <a:srgbClr val="156669"/>
                 </a:solidFill>
@@ -4288,7 +4288,7 @@
                 <a:cs typeface="Public Sans"/>
                 <a:sym typeface="Public Sans"/>
               </a:rPr>
-              <a:t>Demonstração do CRUD </a:t>
+              <a:t>Aplicação e demonstração do CRUD </a:t>
             </a:r>
           </a:p>
         </p:txBody>
